--- a/presentation/handlebars-codex-analysis.pptx
+++ b/presentation/handlebars-codex-analysis.pptx
@@ -9936,6 +9936,87 @@
           </a:p>
         </p:txBody>
       </p:sp>
+      <p:sp>
+        <p:nvSpPr>
+          <p:cNvPr id="14" name="Rectangle 13">
+            <a:extLst>
+              <a:ext uri="{FF2B5EF4-FFF2-40B4-BE49-F238E27FC236}">
+                <a16:creationId xmlns:a16="http://schemas.microsoft.com/office/drawing/2014/main" id="{B3B9F575-11E5-2001-3508-2E0326B97E0F}"/>
+              </a:ext>
+            </a:extLst>
+          </p:cNvPr>
+          <p:cNvSpPr/>
+          <p:nvPr/>
+        </p:nvSpPr>
+        <p:spPr>
+          <a:xfrm>
+            <a:off x="7168243" y="378455"/>
+            <a:ext cx="1485900" cy="1490472"/>
+          </a:xfrm>
+          <a:prstGeom prst="rect">
+            <a:avLst/>
+          </a:prstGeom>
+          <a:ln>
+            <a:solidFill>
+              <a:schemeClr val="tx1"/>
+            </a:solidFill>
+          </a:ln>
+        </p:spPr>
+        <p:style>
+          <a:lnRef idx="2">
+            <a:schemeClr val="dk1">
+              <a:shade val="15000"/>
+            </a:schemeClr>
+          </a:lnRef>
+          <a:fillRef idx="1">
+            <a:schemeClr val="dk1"/>
+          </a:fillRef>
+          <a:effectRef idx="0">
+            <a:schemeClr val="dk1"/>
+          </a:effectRef>
+          <a:fontRef idx="minor">
+            <a:schemeClr val="lt1"/>
+          </a:fontRef>
+        </p:style>
+        <p:txBody>
+          <a:bodyPr rtlCol="0" anchor="ctr"/>
+          <a:lstStyle/>
+          <a:p>
+            <a:pPr algn="ctr"/>
+            <a:endParaRPr lang="en-US"/>
+          </a:p>
+        </p:txBody>
+      </p:sp>
+      <p:pic>
+        <p:nvPicPr>
+          <p:cNvPr id="13" name="Picture 12">
+            <a:extLst>
+              <a:ext uri="{FF2B5EF4-FFF2-40B4-BE49-F238E27FC236}">
+                <a16:creationId xmlns:a16="http://schemas.microsoft.com/office/drawing/2014/main" id="{D257EBB8-9DFA-532F-BDF7-B7C99C56F948}"/>
+              </a:ext>
+            </a:extLst>
+          </p:cNvPr>
+          <p:cNvPicPr>
+            <a:picLocks noChangeAspect="1"/>
+          </p:cNvPicPr>
+          <p:nvPr/>
+        </p:nvPicPr>
+        <p:blipFill>
+          <a:blip r:embed="rId4"/>
+          <a:stretch>
+            <a:fillRect/>
+          </a:stretch>
+        </p:blipFill>
+        <p:spPr>
+          <a:xfrm>
+            <a:off x="7188479" y="396024"/>
+            <a:ext cx="1445428" cy="1445430"/>
+          </a:xfrm>
+          <a:prstGeom prst="rect">
+            <a:avLst/>
+          </a:prstGeom>
+        </p:spPr>
+      </p:pic>
     </p:spTree>
   </p:cSld>
   <p:clrMapOvr>
